--- a/index/designs/y8-l7/l7-dou/l7-dou.pptx
+++ b/index/designs/y8-l7/l7-dou/l7-dou.pptx
@@ -2306,9 +2306,6 @@
               </a:rPr>
               <a:t>⏱ </a:t>
             </a:r>
-            <a:pPr algn="l" indent="0" marL="0">
-              <a:buNone/>
-            </a:pPr>
             <a:r>
               <a:rPr lang="en-US" sz="1100" b="1" dirty="0">
                 <a:solidFill>
@@ -2395,9 +2392,6 @@
               </a:rPr>
               <a:t>📚 </a:t>
             </a:r>
-            <a:pPr algn="l" indent="0" marL="0">
-              <a:buNone/>
-            </a:pPr>
             <a:r>
               <a:rPr lang="en-US" sz="1100" b="1" dirty="0">
                 <a:solidFill>
@@ -2484,9 +2478,6 @@
               </a:rPr>
               <a:t>🎯 </a:t>
             </a:r>
-            <a:pPr algn="l" indent="0" marL="0">
-              <a:buNone/>
-            </a:pPr>
             <a:r>
               <a:rPr lang="en-US" sz="1100" b="1" dirty="0">
                 <a:solidFill>
@@ -2498,9 +2489,6 @@
               </a:rPr>
               <a:t>……，都……</a:t>
             </a:r>
-            <a:pPr algn="l" indent="0" marL="0">
-              <a:buNone/>
-            </a:pPr>
             <a:r>
               <a:rPr lang="en-US" sz="1100" dirty="0">
                 <a:solidFill>
@@ -2587,9 +2575,6 @@
               </a:rPr>
               <a:t>🗣 </a:t>
             </a:r>
-            <a:pPr algn="l" indent="0" marL="0">
-              <a:buNone/>
-            </a:pPr>
             <a:r>
               <a:rPr lang="en-US" sz="1100" b="1" dirty="0">
                 <a:solidFill>
@@ -2601,9 +2586,6 @@
               </a:rPr>
               <a:t>正在</a:t>
             </a:r>
-            <a:pPr algn="l" indent="0" marL="0">
-              <a:buNone/>
-            </a:pPr>
             <a:r>
               <a:rPr lang="en-US" sz="1100" dirty="0">
                 <a:solidFill>
@@ -2615,9 +2597,6 @@
               </a:rPr>
               <a:t> + </a:t>
             </a:r>
-            <a:pPr algn="l" indent="0" marL="0">
-              <a:buNone/>
-            </a:pPr>
             <a:r>
               <a:rPr lang="en-US" sz="1100" b="1" dirty="0">
                 <a:solidFill>
@@ -2629,9 +2608,6 @@
               </a:rPr>
               <a:t>都</a:t>
             </a:r>
-            <a:pPr algn="l" indent="0" marL="0">
-              <a:buNone/>
-            </a:pPr>
             <a:r>
               <a:rPr lang="en-US" sz="1100" dirty="0">
                 <a:solidFill>
@@ -5425,12 +5401,6 @@
               </a:rPr>
               <a:t>你</a:t>
             </a:r>
-            <a:pPr algn="l" indent="0" marL="0">
-              <a:lnSpc>
-                <a:spcPts val="2100"/>
-              </a:lnSpc>
-              <a:buNone/>
-            </a:pPr>
             <a:r>
               <a:rPr lang="en-US" sz="1500" b="1" dirty="0">
                 <a:solidFill>
@@ -5442,12 +5412,6 @@
               </a:rPr>
               <a:t>正在</a:t>
             </a:r>
-            <a:pPr algn="l" indent="0" marL="0">
-              <a:lnSpc>
-                <a:spcPts val="2100"/>
-              </a:lnSpc>
-              <a:buNone/>
-            </a:pPr>
             <a:r>
               <a:rPr lang="en-US" sz="1500" dirty="0">
                 <a:solidFill>
@@ -5627,12 +5591,6 @@
               </a:rPr>
               <a:t>我</a:t>
             </a:r>
-            <a:pPr algn="l" indent="0" marL="0">
-              <a:lnSpc>
-                <a:spcPts val="2100"/>
-              </a:lnSpc>
-              <a:buNone/>
-            </a:pPr>
             <a:r>
               <a:rPr lang="en-US" sz="1500" b="1" dirty="0">
                 <a:solidFill>
@@ -5644,12 +5602,6 @@
               </a:rPr>
               <a:t>正在</a:t>
             </a:r>
-            <a:pPr algn="l" indent="0" marL="0">
-              <a:lnSpc>
-                <a:spcPts val="2100"/>
-              </a:lnSpc>
-              <a:buNone/>
-            </a:pPr>
             <a:r>
               <a:rPr lang="en-US" sz="1500" dirty="0">
                 <a:solidFill>
@@ -5829,12 +5781,6 @@
               </a:rPr>
               <a:t>你喜欢</a:t>
             </a:r>
-            <a:pPr algn="l" indent="0" marL="0">
-              <a:lnSpc>
-                <a:spcPts val="2100"/>
-              </a:lnSpc>
-              <a:buNone/>
-            </a:pPr>
             <a:r>
               <a:rPr lang="en-US" sz="1500" dirty="0">
                 <a:solidFill>
@@ -6014,12 +5960,6 @@
               </a:rPr>
               <a:t>、</a:t>
             </a:r>
-            <a:pPr algn="l" indent="0" marL="0">
-              <a:lnSpc>
-                <a:spcPts val="2100"/>
-              </a:lnSpc>
-              <a:buNone/>
-            </a:pPr>
             <a:r>
               <a:rPr lang="en-US" sz="1500" dirty="0">
                 <a:solidFill>
@@ -6031,12 +5971,6 @@
               </a:rPr>
               <a:t>，我</a:t>
             </a:r>
-            <a:pPr algn="l" indent="0" marL="0">
-              <a:lnSpc>
-                <a:spcPts val="2100"/>
-              </a:lnSpc>
-              <a:buNone/>
-            </a:pPr>
             <a:r>
               <a:rPr lang="en-US" sz="1500" b="1" dirty="0">
                 <a:solidFill>
@@ -6048,12 +5982,6 @@
               </a:rPr>
               <a:t>都</a:t>
             </a:r>
-            <a:pPr algn="l" indent="0" marL="0">
-              <a:lnSpc>
-                <a:spcPts val="2100"/>
-              </a:lnSpc>
-              <a:buNone/>
-            </a:pPr>
             <a:r>
               <a:rPr lang="en-US" sz="1500" dirty="0">
                 <a:solidFill>
@@ -6233,12 +6161,6 @@
               </a:rPr>
               <a:t>我也</a:t>
             </a:r>
-            <a:pPr algn="l" indent="0" marL="0">
-              <a:lnSpc>
-                <a:spcPts val="2100"/>
-              </a:lnSpc>
-              <a:buNone/>
-            </a:pPr>
             <a:r>
               <a:rPr lang="en-US" sz="1500" b="1" dirty="0">
                 <a:solidFill>
@@ -6250,12 +6172,6 @@
               </a:rPr>
               <a:t>都</a:t>
             </a:r>
-            <a:pPr algn="l" indent="0" marL="0">
-              <a:lnSpc>
-                <a:spcPts val="2100"/>
-              </a:lnSpc>
-              <a:buNone/>
-            </a:pPr>
             <a:r>
               <a:rPr lang="en-US" sz="1500" dirty="0">
                 <a:solidFill>
@@ -6267,12 +6183,6 @@
               </a:rPr>
               <a:t>喜欢！ / 我只喜欢</a:t>
             </a:r>
-            <a:pPr algn="l" indent="0" marL="0">
-              <a:lnSpc>
-                <a:spcPts val="2100"/>
-              </a:lnSpc>
-              <a:buNone/>
-            </a:pPr>
             <a:r>
               <a:rPr lang="en-US" sz="1500" dirty="0">
                 <a:solidFill>
@@ -7310,12 +7220,6 @@
               </a:rPr>
               <a:t>弹钢琴、唱歌，</a:t>
             </a:r>
-            <a:pPr algn="l" indent="0" marL="0">
-              <a:lnSpc>
-                <a:spcPts val="2800"/>
-              </a:lnSpc>
-              <a:buNone/>
-            </a:pPr>
             <a:r>
               <a:rPr lang="en-US" sz="2000" dirty="0">
                 <a:solidFill>
@@ -7447,12 +7351,6 @@
               </a:rPr>
               <a:t>小说、杂志，他</a:t>
             </a:r>
-            <a:pPr algn="l" indent="0" marL="0">
-              <a:lnSpc>
-                <a:spcPts val="2800"/>
-              </a:lnSpc>
-              <a:buNone/>
-            </a:pPr>
             <a:r>
               <a:rPr lang="en-US" sz="2000" dirty="0">
                 <a:solidFill>
@@ -7584,12 +7482,6 @@
               </a:rPr>
               <a:t>油画儿、水彩画儿、国画儿，</a:t>
             </a:r>
-            <a:pPr algn="l" indent="0" marL="0">
-              <a:lnSpc>
-                <a:spcPts val="2800"/>
-              </a:lnSpc>
-              <a:buNone/>
-            </a:pPr>
             <a:r>
               <a:rPr lang="en-US" sz="2000" dirty="0">
                 <a:solidFill>
@@ -8574,6 +8466,147 @@
               </a:rPr>
               <a:t>Place </a:t>
             </a:r>
+            <a:r>
+              <a:rPr lang="en-US" sz="1100" b="1" dirty="0">
+                <a:solidFill>
+                  <a:srgbClr val="C8943E"/>
+                </a:solidFill>
+                <a:latin typeface="Noto Sans SC" pitchFamily="34" charset="0"/>
+                <a:ea typeface="Noto Sans SC" pitchFamily="34" charset="-122"/>
+                <a:cs typeface="Noto Sans SC" pitchFamily="34" charset="-120"/>
+              </a:rPr>
+              <a:t>都</a:t>
+            </a:r>
+            <a:r>
+              <a:rPr lang="en-US" sz="1100" dirty="0">
+                <a:solidFill>
+                  <a:srgbClr val="1E2A38"/>
+                </a:solidFill>
+                <a:latin typeface="Noto Sans SC" pitchFamily="34" charset="0"/>
+                <a:ea typeface="Noto Sans SC" pitchFamily="34" charset="-122"/>
+                <a:cs typeface="Noto Sans SC" pitchFamily="34" charset="-120"/>
+              </a:rPr>
+              <a:t> after subject, before verb</a:t>
+            </a:r>
+            <a:endParaRPr lang="en-US" sz="1100" dirty="0"/>
+          </a:p>
+        </p:txBody>
+      </p:sp>
+      <p:sp>
+        <p:nvSpPr>
+          <p:cNvPr id="15" name="Shape 13"/>
+          <p:cNvSpPr/>
+          <p:nvPr/>
+        </p:nvSpPr>
+        <p:spPr>
+          <a:xfrm>
+            <a:off x="720626" y="2860625"/>
+            <a:ext cx="3181499" cy="0"/>
+          </a:xfrm>
+          <a:prstGeom prst="line">
+            <a:avLst/>
+          </a:prstGeom>
+          <a:noFill/>
+          <a:ln w="9525">
+            <a:solidFill>
+              <a:srgbClr val="E5DFD0"/>
+            </a:solidFill>
+            <a:prstDash val="solid"/>
+          </a:ln>
+        </p:spPr>
+      </p:sp>
+      <p:sp>
+        <p:nvSpPr>
+          <p:cNvPr id="16" name="Text 14"/>
+          <p:cNvSpPr/>
+          <p:nvPr/>
+        </p:nvSpPr>
+        <p:spPr>
+          <a:xfrm>
+            <a:off x="720626" y="2364581"/>
+            <a:ext cx="228600" cy="228600"/>
+          </a:xfrm>
+          <a:prstGeom prst="roundRect">
+            <a:avLst>
+              <a:gd name="adj" fmla="val 400000"/>
+            </a:avLst>
+          </a:prstGeom>
+          <a:solidFill>
+            <a:srgbClr val="3A7D8C"/>
+          </a:solidFill>
+          <a:ln/>
+        </p:spPr>
+        <p:txBody>
+          <a:bodyPr wrap="square" rtlCol="0" anchor="ctr"/>
+          <a:lstStyle/>
+          <a:p>
+            <a:pPr indent="0" marL="0">
+              <a:buNone/>
+            </a:pPr>
+            <a:endParaRPr lang="en-US" dirty="0"/>
+          </a:p>
+        </p:txBody>
+      </p:sp>
+      <p:sp>
+        <p:nvSpPr>
+          <p:cNvPr id="17" name="Text 15"/>
+          <p:cNvSpPr/>
+          <p:nvPr/>
+        </p:nvSpPr>
+        <p:spPr>
+          <a:xfrm>
+            <a:off x="791170" y="2397919"/>
+            <a:ext cx="89109" cy="161925"/>
+          </a:xfrm>
+          <a:prstGeom prst="rect">
+            <a:avLst/>
+          </a:prstGeom>
+          <a:noFill/>
+          <a:ln/>
+        </p:spPr>
+        <p:txBody>
+          <a:bodyPr wrap="square" lIns="0" tIns="0" rIns="0" bIns="0" rtlCol="0" anchor="t"/>
+          <a:lstStyle/>
+          <a:p>
+            <a:pPr algn="l" indent="0" marL="0">
+              <a:buNone/>
+            </a:pPr>
+            <a:r>
+              <a:rPr lang="en-US" sz="900" b="1" dirty="0">
+                <a:solidFill>
+                  <a:srgbClr val="FFFFFF"/>
+                </a:solidFill>
+                <a:latin typeface="Noto Sans SC" pitchFamily="34" charset="0"/>
+                <a:ea typeface="Noto Sans SC" pitchFamily="34" charset="-122"/>
+                <a:cs typeface="Noto Sans SC" pitchFamily="34" charset="-120"/>
+              </a:rPr>
+              <a:t>✓</a:t>
+            </a:r>
+            <a:endParaRPr lang="en-US" sz="900" dirty="0"/>
+          </a:p>
+        </p:txBody>
+      </p:sp>
+      <p:sp>
+        <p:nvSpPr>
+          <p:cNvPr id="18" name="Text 16"/>
+          <p:cNvSpPr/>
+          <p:nvPr/>
+        </p:nvSpPr>
+        <p:spPr>
+          <a:xfrm>
+            <a:off x="1063526" y="2377232"/>
+            <a:ext cx="2895371" cy="377130"/>
+          </a:xfrm>
+          <a:prstGeom prst="rect">
+            <a:avLst/>
+          </a:prstGeom>
+          <a:noFill/>
+          <a:ln/>
+        </p:spPr>
+        <p:txBody>
+          <a:bodyPr wrap="square" lIns="0" tIns="0" rIns="0" bIns="0" rtlCol="0" anchor="t"/>
+          <a:lstStyle/>
+          <a:p>
             <a:pPr algn="l" indent="0" marL="0">
               <a:lnSpc>
                 <a:spcPts val="1485"/>
@@ -8584,6 +8617,17 @@
               <a:buNone/>
             </a:pPr>
             <a:r>
+              <a:rPr lang="en-US" sz="1100" dirty="0">
+                <a:solidFill>
+                  <a:srgbClr val="1E2A38"/>
+                </a:solidFill>
+                <a:latin typeface="Noto Sans SC" pitchFamily="34" charset="0"/>
+                <a:ea typeface="Noto Sans SC" pitchFamily="34" charset="-122"/>
+                <a:cs typeface="Noto Sans SC" pitchFamily="34" charset="-120"/>
+              </a:rPr>
+              <a:t>List two or more items + use </a:t>
+            </a:r>
+            <a:r>
               <a:rPr lang="en-US" sz="1100" b="1" dirty="0">
                 <a:solidFill>
                   <a:srgbClr val="C8943E"/>
@@ -8594,6 +8638,113 @@
               </a:rPr>
               <a:t>都</a:t>
             </a:r>
+            <a:r>
+              <a:rPr lang="en-US" sz="1100" dirty="0">
+                <a:solidFill>
+                  <a:srgbClr val="1E2A38"/>
+                </a:solidFill>
+                <a:latin typeface="Noto Sans SC" pitchFamily="34" charset="0"/>
+                <a:ea typeface="Noto Sans SC" pitchFamily="34" charset="-122"/>
+                <a:cs typeface="Noto Sans SC" pitchFamily="34" charset="-120"/>
+              </a:rPr>
+              <a:t> to say I like them all</a:t>
+            </a:r>
+            <a:endParaRPr lang="en-US" sz="1100" dirty="0"/>
+          </a:p>
+        </p:txBody>
+      </p:sp>
+      <p:sp>
+        <p:nvSpPr>
+          <p:cNvPr id="19" name="Text 17"/>
+          <p:cNvSpPr/>
+          <p:nvPr/>
+        </p:nvSpPr>
+        <p:spPr>
+          <a:xfrm>
+            <a:off x="720626" y="3093839"/>
+            <a:ext cx="228600" cy="228600"/>
+          </a:xfrm>
+          <a:prstGeom prst="roundRect">
+            <a:avLst>
+              <a:gd name="adj" fmla="val 400000"/>
+            </a:avLst>
+          </a:prstGeom>
+          <a:solidFill>
+            <a:srgbClr val="3A7D8C"/>
+          </a:solidFill>
+          <a:ln/>
+        </p:spPr>
+        <p:txBody>
+          <a:bodyPr wrap="square" rtlCol="0" anchor="ctr"/>
+          <a:lstStyle/>
+          <a:p>
+            <a:pPr indent="0" marL="0">
+              <a:buNone/>
+            </a:pPr>
+            <a:endParaRPr lang="en-US" dirty="0"/>
+          </a:p>
+        </p:txBody>
+      </p:sp>
+      <p:sp>
+        <p:nvSpPr>
+          <p:cNvPr id="20" name="Text 18"/>
+          <p:cNvSpPr/>
+          <p:nvPr/>
+        </p:nvSpPr>
+        <p:spPr>
+          <a:xfrm>
+            <a:off x="791170" y="3127177"/>
+            <a:ext cx="89109" cy="161925"/>
+          </a:xfrm>
+          <a:prstGeom prst="rect">
+            <a:avLst/>
+          </a:prstGeom>
+          <a:noFill/>
+          <a:ln/>
+        </p:spPr>
+        <p:txBody>
+          <a:bodyPr wrap="square" lIns="0" tIns="0" rIns="0" bIns="0" rtlCol="0" anchor="t"/>
+          <a:lstStyle/>
+          <a:p>
+            <a:pPr algn="l" indent="0" marL="0">
+              <a:buNone/>
+            </a:pPr>
+            <a:r>
+              <a:rPr lang="en-US" sz="900" b="1" dirty="0">
+                <a:solidFill>
+                  <a:srgbClr val="FFFFFF"/>
+                </a:solidFill>
+                <a:latin typeface="Noto Sans SC" pitchFamily="34" charset="0"/>
+                <a:ea typeface="Noto Sans SC" pitchFamily="34" charset="-122"/>
+                <a:cs typeface="Noto Sans SC" pitchFamily="34" charset="-120"/>
+              </a:rPr>
+              <a:t>✓</a:t>
+            </a:r>
+            <a:endParaRPr lang="en-US" sz="900" dirty="0"/>
+          </a:p>
+        </p:txBody>
+      </p:sp>
+      <p:sp>
+        <p:nvSpPr>
+          <p:cNvPr id="21" name="Text 19"/>
+          <p:cNvSpPr/>
+          <p:nvPr/>
+        </p:nvSpPr>
+        <p:spPr>
+          <a:xfrm>
+            <a:off x="1063526" y="3106489"/>
+            <a:ext cx="2376958" cy="188565"/>
+          </a:xfrm>
+          <a:prstGeom prst="rect">
+            <a:avLst/>
+          </a:prstGeom>
+          <a:noFill/>
+          <a:ln/>
+        </p:spPr>
+        <p:txBody>
+          <a:bodyPr wrap="square" lIns="0" tIns="0" rIns="0" bIns="0" rtlCol="0" anchor="t"/>
+          <a:lstStyle/>
+          <a:p>
             <a:pPr algn="l" indent="0" marL="0">
               <a:lnSpc>
                 <a:spcPts val="1485"/>
@@ -8612,136 +8763,19 @@
                 <a:ea typeface="Noto Sans SC" pitchFamily="34" charset="-122"/>
                 <a:cs typeface="Noto Sans SC" pitchFamily="34" charset="-120"/>
               </a:rPr>
-              <a:t> after subject, before verb</a:t>
-            </a:r>
-            <a:endParaRPr lang="en-US" sz="1100" dirty="0"/>
-          </a:p>
-        </p:txBody>
-      </p:sp>
-      <p:sp>
-        <p:nvSpPr>
-          <p:cNvPr id="15" name="Shape 13"/>
-          <p:cNvSpPr/>
-          <p:nvPr/>
-        </p:nvSpPr>
-        <p:spPr>
-          <a:xfrm>
-            <a:off x="720626" y="2860625"/>
-            <a:ext cx="3181499" cy="0"/>
-          </a:xfrm>
-          <a:prstGeom prst="line">
-            <a:avLst/>
-          </a:prstGeom>
-          <a:noFill/>
-          <a:ln w="9525">
-            <a:solidFill>
-              <a:srgbClr val="E5DFD0"/>
-            </a:solidFill>
-            <a:prstDash val="solid"/>
-          </a:ln>
-        </p:spPr>
-      </p:sp>
-      <p:sp>
-        <p:nvSpPr>
-          <p:cNvPr id="16" name="Text 14"/>
-          <p:cNvSpPr/>
-          <p:nvPr/>
-        </p:nvSpPr>
-        <p:spPr>
-          <a:xfrm>
-            <a:off x="720626" y="2364581"/>
-            <a:ext cx="228600" cy="228600"/>
-          </a:xfrm>
-          <a:prstGeom prst="roundRect">
-            <a:avLst>
-              <a:gd name="adj" fmla="val 400000"/>
-            </a:avLst>
-          </a:prstGeom>
-          <a:solidFill>
-            <a:srgbClr val="3A7D8C"/>
-          </a:solidFill>
-          <a:ln/>
-        </p:spPr>
-        <p:txBody>
-          <a:bodyPr wrap="square" rtlCol="0" anchor="ctr"/>
-          <a:lstStyle/>
-          <a:p>
-            <a:pPr indent="0" marL="0">
-              <a:buNone/>
-            </a:pPr>
-            <a:endParaRPr lang="en-US" dirty="0"/>
-          </a:p>
-        </p:txBody>
-      </p:sp>
-      <p:sp>
-        <p:nvSpPr>
-          <p:cNvPr id="17" name="Text 15"/>
-          <p:cNvSpPr/>
-          <p:nvPr/>
-        </p:nvSpPr>
-        <p:spPr>
-          <a:xfrm>
-            <a:off x="791170" y="2397919"/>
-            <a:ext cx="89109" cy="161925"/>
-          </a:xfrm>
-          <a:prstGeom prst="rect">
-            <a:avLst/>
-          </a:prstGeom>
-          <a:noFill/>
-          <a:ln/>
-        </p:spPr>
-        <p:txBody>
-          <a:bodyPr wrap="square" lIns="0" tIns="0" rIns="0" bIns="0" rtlCol="0" anchor="t"/>
-          <a:lstStyle/>
-          <a:p>
-            <a:pPr algn="l" indent="0" marL="0">
-              <a:buNone/>
-            </a:pPr>
-            <a:r>
-              <a:rPr lang="en-US" sz="900" b="1" dirty="0">
-                <a:solidFill>
-                  <a:srgbClr val="FFFFFF"/>
-                </a:solidFill>
-                <a:latin typeface="Noto Sans SC" pitchFamily="34" charset="0"/>
-                <a:ea typeface="Noto Sans SC" pitchFamily="34" charset="-122"/>
-                <a:cs typeface="Noto Sans SC" pitchFamily="34" charset="-120"/>
-              </a:rPr>
-              <a:t>✓</a:t>
-            </a:r>
-            <a:endParaRPr lang="en-US" sz="900" dirty="0"/>
-          </a:p>
-        </p:txBody>
-      </p:sp>
-      <p:sp>
-        <p:nvSpPr>
-          <p:cNvPr id="18" name="Text 16"/>
-          <p:cNvSpPr/>
-          <p:nvPr/>
-        </p:nvSpPr>
-        <p:spPr>
-          <a:xfrm>
-            <a:off x="1063526" y="2377232"/>
-            <a:ext cx="2895371" cy="377130"/>
-          </a:xfrm>
-          <a:prstGeom prst="rect">
-            <a:avLst/>
-          </a:prstGeom>
-          <a:noFill/>
-          <a:ln/>
-        </p:spPr>
-        <p:txBody>
-          <a:bodyPr wrap="square" lIns="0" tIns="0" rIns="0" bIns="0" rtlCol="0" anchor="t"/>
-          <a:lstStyle/>
-          <a:p>
-            <a:pPr algn="l" indent="0" marL="0">
-              <a:lnSpc>
-                <a:spcPts val="1485"/>
-              </a:lnSpc>
-              <a:spcBef>
-                <a:spcPts val="100"/>
-              </a:spcBef>
-              <a:buNone/>
-            </a:pPr>
+              <a:t>Combine </a:t>
+            </a:r>
+            <a:r>
+              <a:rPr lang="en-US" sz="1100" b="1" dirty="0">
+                <a:solidFill>
+                  <a:srgbClr val="C8943E"/>
+                </a:solidFill>
+                <a:latin typeface="Noto Sans SC" pitchFamily="34" charset="0"/>
+                <a:ea typeface="Noto Sans SC" pitchFamily="34" charset="-122"/>
+                <a:cs typeface="Noto Sans SC" pitchFamily="34" charset="-120"/>
+              </a:rPr>
+              <a:t>都</a:t>
+            </a:r>
             <a:r>
               <a:rPr lang="en-US" sz="1100" dirty="0">
                 <a:solidFill>
@@ -8751,17 +8785,8 @@
                 <a:ea typeface="Noto Sans SC" pitchFamily="34" charset="-122"/>
                 <a:cs typeface="Noto Sans SC" pitchFamily="34" charset="-120"/>
               </a:rPr>
-              <a:t>List two or more items + use </a:t>
-            </a:r>
-            <a:pPr algn="l" indent="0" marL="0">
-              <a:lnSpc>
-                <a:spcPts val="1485"/>
-              </a:lnSpc>
-              <a:spcBef>
-                <a:spcPts val="100"/>
-              </a:spcBef>
-              <a:buNone/>
-            </a:pPr>
+              <a:t> and </a:t>
+            </a:r>
             <a:r>
               <a:rPr lang="en-US" sz="1100" b="1" dirty="0">
                 <a:solidFill>
@@ -8771,213 +8796,8 @@
                 <a:ea typeface="Noto Sans SC" pitchFamily="34" charset="-122"/>
                 <a:cs typeface="Noto Sans SC" pitchFamily="34" charset="-120"/>
               </a:rPr>
-              <a:t>都</a:t>
-            </a:r>
-            <a:pPr algn="l" indent="0" marL="0">
-              <a:lnSpc>
-                <a:spcPts val="1485"/>
-              </a:lnSpc>
-              <a:spcBef>
-                <a:spcPts val="100"/>
-              </a:spcBef>
-              <a:buNone/>
-            </a:pPr>
-            <a:r>
-              <a:rPr lang="en-US" sz="1100" dirty="0">
-                <a:solidFill>
-                  <a:srgbClr val="1E2A38"/>
-                </a:solidFill>
-                <a:latin typeface="Noto Sans SC" pitchFamily="34" charset="0"/>
-                <a:ea typeface="Noto Sans SC" pitchFamily="34" charset="-122"/>
-                <a:cs typeface="Noto Sans SC" pitchFamily="34" charset="-120"/>
-              </a:rPr>
-              <a:t> to say I like them all</a:t>
-            </a:r>
-            <a:endParaRPr lang="en-US" sz="1100" dirty="0"/>
-          </a:p>
-        </p:txBody>
-      </p:sp>
-      <p:sp>
-        <p:nvSpPr>
-          <p:cNvPr id="19" name="Text 17"/>
-          <p:cNvSpPr/>
-          <p:nvPr/>
-        </p:nvSpPr>
-        <p:spPr>
-          <a:xfrm>
-            <a:off x="720626" y="3093839"/>
-            <a:ext cx="228600" cy="228600"/>
-          </a:xfrm>
-          <a:prstGeom prst="roundRect">
-            <a:avLst>
-              <a:gd name="adj" fmla="val 400000"/>
-            </a:avLst>
-          </a:prstGeom>
-          <a:solidFill>
-            <a:srgbClr val="3A7D8C"/>
-          </a:solidFill>
-          <a:ln/>
-        </p:spPr>
-        <p:txBody>
-          <a:bodyPr wrap="square" rtlCol="0" anchor="ctr"/>
-          <a:lstStyle/>
-          <a:p>
-            <a:pPr indent="0" marL="0">
-              <a:buNone/>
-            </a:pPr>
-            <a:endParaRPr lang="en-US" dirty="0"/>
-          </a:p>
-        </p:txBody>
-      </p:sp>
-      <p:sp>
-        <p:nvSpPr>
-          <p:cNvPr id="20" name="Text 18"/>
-          <p:cNvSpPr/>
-          <p:nvPr/>
-        </p:nvSpPr>
-        <p:spPr>
-          <a:xfrm>
-            <a:off x="791170" y="3127177"/>
-            <a:ext cx="89109" cy="161925"/>
-          </a:xfrm>
-          <a:prstGeom prst="rect">
-            <a:avLst/>
-          </a:prstGeom>
-          <a:noFill/>
-          <a:ln/>
-        </p:spPr>
-        <p:txBody>
-          <a:bodyPr wrap="square" lIns="0" tIns="0" rIns="0" bIns="0" rtlCol="0" anchor="t"/>
-          <a:lstStyle/>
-          <a:p>
-            <a:pPr algn="l" indent="0" marL="0">
-              <a:buNone/>
-            </a:pPr>
-            <a:r>
-              <a:rPr lang="en-US" sz="900" b="1" dirty="0">
-                <a:solidFill>
-                  <a:srgbClr val="FFFFFF"/>
-                </a:solidFill>
-                <a:latin typeface="Noto Sans SC" pitchFamily="34" charset="0"/>
-                <a:ea typeface="Noto Sans SC" pitchFamily="34" charset="-122"/>
-                <a:cs typeface="Noto Sans SC" pitchFamily="34" charset="-120"/>
-              </a:rPr>
-              <a:t>✓</a:t>
-            </a:r>
-            <a:endParaRPr lang="en-US" sz="900" dirty="0"/>
-          </a:p>
-        </p:txBody>
-      </p:sp>
-      <p:sp>
-        <p:nvSpPr>
-          <p:cNvPr id="21" name="Text 19"/>
-          <p:cNvSpPr/>
-          <p:nvPr/>
-        </p:nvSpPr>
-        <p:spPr>
-          <a:xfrm>
-            <a:off x="1063526" y="3106489"/>
-            <a:ext cx="2376958" cy="188565"/>
-          </a:xfrm>
-          <a:prstGeom prst="rect">
-            <a:avLst/>
-          </a:prstGeom>
-          <a:noFill/>
-          <a:ln/>
-        </p:spPr>
-        <p:txBody>
-          <a:bodyPr wrap="square" lIns="0" tIns="0" rIns="0" bIns="0" rtlCol="0" anchor="t"/>
-          <a:lstStyle/>
-          <a:p>
-            <a:pPr algn="l" indent="0" marL="0">
-              <a:lnSpc>
-                <a:spcPts val="1485"/>
-              </a:lnSpc>
-              <a:spcBef>
-                <a:spcPts val="100"/>
-              </a:spcBef>
-              <a:buNone/>
-            </a:pPr>
-            <a:r>
-              <a:rPr lang="en-US" sz="1100" dirty="0">
-                <a:solidFill>
-                  <a:srgbClr val="1E2A38"/>
-                </a:solidFill>
-                <a:latin typeface="Noto Sans SC" pitchFamily="34" charset="0"/>
-                <a:ea typeface="Noto Sans SC" pitchFamily="34" charset="-122"/>
-                <a:cs typeface="Noto Sans SC" pitchFamily="34" charset="-120"/>
-              </a:rPr>
-              <a:t>Combine </a:t>
-            </a:r>
-            <a:pPr algn="l" indent="0" marL="0">
-              <a:lnSpc>
-                <a:spcPts val="1485"/>
-              </a:lnSpc>
-              <a:spcBef>
-                <a:spcPts val="100"/>
-              </a:spcBef>
-              <a:buNone/>
-            </a:pPr>
-            <a:r>
-              <a:rPr lang="en-US" sz="1100" b="1" dirty="0">
-                <a:solidFill>
-                  <a:srgbClr val="C8943E"/>
-                </a:solidFill>
-                <a:latin typeface="Noto Sans SC" pitchFamily="34" charset="0"/>
-                <a:ea typeface="Noto Sans SC" pitchFamily="34" charset="-122"/>
-                <a:cs typeface="Noto Sans SC" pitchFamily="34" charset="-120"/>
-              </a:rPr>
-              <a:t>都</a:t>
-            </a:r>
-            <a:pPr algn="l" indent="0" marL="0">
-              <a:lnSpc>
-                <a:spcPts val="1485"/>
-              </a:lnSpc>
-              <a:spcBef>
-                <a:spcPts val="100"/>
-              </a:spcBef>
-              <a:buNone/>
-            </a:pPr>
-            <a:r>
-              <a:rPr lang="en-US" sz="1100" dirty="0">
-                <a:solidFill>
-                  <a:srgbClr val="1E2A38"/>
-                </a:solidFill>
-                <a:latin typeface="Noto Sans SC" pitchFamily="34" charset="0"/>
-                <a:ea typeface="Noto Sans SC" pitchFamily="34" charset="-122"/>
-                <a:cs typeface="Noto Sans SC" pitchFamily="34" charset="-120"/>
-              </a:rPr>
-              <a:t> and </a:t>
-            </a:r>
-            <a:pPr algn="l" indent="0" marL="0">
-              <a:lnSpc>
-                <a:spcPts val="1485"/>
-              </a:lnSpc>
-              <a:spcBef>
-                <a:spcPts val="100"/>
-              </a:spcBef>
-              <a:buNone/>
-            </a:pPr>
-            <a:r>
-              <a:rPr lang="en-US" sz="1100" b="1" dirty="0">
-                <a:solidFill>
-                  <a:srgbClr val="C8943E"/>
-                </a:solidFill>
-                <a:latin typeface="Noto Sans SC" pitchFamily="34" charset="0"/>
-                <a:ea typeface="Noto Sans SC" pitchFamily="34" charset="-122"/>
-                <a:cs typeface="Noto Sans SC" pitchFamily="34" charset="-120"/>
-              </a:rPr>
               <a:t>正在</a:t>
             </a:r>
-            <a:pPr algn="l" indent="0" marL="0">
-              <a:lnSpc>
-                <a:spcPts val="1485"/>
-              </a:lnSpc>
-              <a:spcBef>
-                <a:spcPts val="100"/>
-              </a:spcBef>
-              <a:buNone/>
-            </a:pPr>
             <a:r>
               <a:rPr lang="en-US" sz="1100" dirty="0">
                 <a:solidFill>
@@ -9589,15 +9409,6 @@
               </a:rPr>
               <a:t>、</a:t>
             </a:r>
-            <a:pPr algn="l" indent="0" marL="0">
-              <a:lnSpc>
-                <a:spcPts val="1960"/>
-              </a:lnSpc>
-              <a:spcBef>
-                <a:spcPts val="600"/>
-              </a:spcBef>
-              <a:buNone/>
-            </a:pPr>
             <a:r>
               <a:rPr lang="en-US" sz="1400" dirty="0">
                 <a:solidFill>
@@ -9609,15 +9420,6 @@
               </a:rPr>
               <a:t>，我</a:t>
             </a:r>
-            <a:pPr algn="l" indent="0" marL="0">
-              <a:lnSpc>
-                <a:spcPts val="1960"/>
-              </a:lnSpc>
-              <a:spcBef>
-                <a:spcPts val="600"/>
-              </a:spcBef>
-              <a:buNone/>
-            </a:pPr>
             <a:r>
               <a:rPr lang="en-US" sz="1400" b="1" dirty="0">
                 <a:solidFill>
@@ -9629,15 +9431,6 @@
               </a:rPr>
               <a:t>都</a:t>
             </a:r>
-            <a:pPr algn="l" indent="0" marL="0">
-              <a:lnSpc>
-                <a:spcPts val="1960"/>
-              </a:lnSpc>
-              <a:spcBef>
-                <a:spcPts val="600"/>
-              </a:spcBef>
-              <a:buNone/>
-            </a:pPr>
             <a:r>
               <a:rPr lang="en-US" sz="1400" dirty="0">
                 <a:solidFill>
@@ -9649,15 +9442,6 @@
               </a:rPr>
               <a:t>喜欢</a:t>
             </a:r>
-            <a:pPr algn="l" indent="0" marL="0">
-              <a:lnSpc>
-                <a:spcPts val="1960"/>
-              </a:lnSpc>
-              <a:spcBef>
-                <a:spcPts val="600"/>
-              </a:spcBef>
-              <a:buNone/>
-            </a:pPr>
             <a:r>
               <a:rPr lang="en-US" sz="1400" dirty="0">
                 <a:solidFill>
@@ -11692,6 +11476,124 @@
               </a:rPr>
               <a:t>Teacher mimes </a:t>
             </a:r>
+            <a:r>
+              <a:rPr lang="en-US" sz="1100" b="1" dirty="0">
+                <a:solidFill>
+                  <a:srgbClr val="1E2A38"/>
+                </a:solidFill>
+                <a:latin typeface="Noto Sans SC" pitchFamily="34" charset="0"/>
+                <a:ea typeface="Noto Sans SC" pitchFamily="34" charset="-122"/>
+                <a:cs typeface="Noto Sans SC" pitchFamily="34" charset="-120"/>
+              </a:rPr>
+              <a:t>3 different actions</a:t>
+            </a:r>
+            <a:r>
+              <a:rPr lang="en-US" sz="1100" dirty="0">
+                <a:solidFill>
+                  <a:srgbClr val="1E2A38"/>
+                </a:solidFill>
+                <a:latin typeface="Noto Sans SC" pitchFamily="34" charset="0"/>
+                <a:ea typeface="Noto Sans SC" pitchFamily="34" charset="-122"/>
+                <a:cs typeface="Noto Sans SC" pitchFamily="34" charset="-120"/>
+              </a:rPr>
+              <a:t> — one at a time.</a:t>
+            </a:r>
+            <a:endParaRPr lang="en-US" sz="1100" dirty="0"/>
+          </a:p>
+        </p:txBody>
+      </p:sp>
+      <p:sp>
+        <p:nvSpPr>
+          <p:cNvPr id="16" name="Text 14"/>
+          <p:cNvSpPr/>
+          <p:nvPr/>
+        </p:nvSpPr>
+        <p:spPr>
+          <a:xfrm>
+            <a:off x="796826" y="2574429"/>
+            <a:ext cx="279350" cy="279350"/>
+          </a:xfrm>
+          <a:prstGeom prst="roundRect">
+            <a:avLst>
+              <a:gd name="adj" fmla="val 327331"/>
+            </a:avLst>
+          </a:prstGeom>
+          <a:solidFill>
+            <a:srgbClr val="3A7D8C"/>
+          </a:solidFill>
+          <a:ln/>
+        </p:spPr>
+        <p:txBody>
+          <a:bodyPr wrap="square" rtlCol="0" anchor="ctr"/>
+          <a:lstStyle/>
+          <a:p>
+            <a:pPr indent="0" marL="0">
+              <a:buNone/>
+            </a:pPr>
+            <a:endParaRPr lang="en-US" dirty="0"/>
+          </a:p>
+        </p:txBody>
+      </p:sp>
+      <p:sp>
+        <p:nvSpPr>
+          <p:cNvPr id="17" name="Text 15"/>
+          <p:cNvSpPr/>
+          <p:nvPr/>
+        </p:nvSpPr>
+        <p:spPr>
+          <a:xfrm>
+            <a:off x="900261" y="2633067"/>
+            <a:ext cx="73929" cy="161925"/>
+          </a:xfrm>
+          <a:prstGeom prst="rect">
+            <a:avLst/>
+          </a:prstGeom>
+          <a:noFill/>
+          <a:ln/>
+        </p:spPr>
+        <p:txBody>
+          <a:bodyPr wrap="square" lIns="0" tIns="0" rIns="0" bIns="0" rtlCol="0" anchor="t"/>
+          <a:lstStyle/>
+          <a:p>
+            <a:pPr algn="l" indent="0" marL="0">
+              <a:buNone/>
+            </a:pPr>
+            <a:r>
+              <a:rPr lang="en-US" sz="900" b="1" dirty="0">
+                <a:solidFill>
+                  <a:srgbClr val="FFFFFF"/>
+                </a:solidFill>
+                <a:latin typeface="Noto Sans SC" pitchFamily="34" charset="0"/>
+                <a:ea typeface="Noto Sans SC" pitchFamily="34" charset="-122"/>
+                <a:cs typeface="Noto Sans SC" pitchFamily="34" charset="-120"/>
+              </a:rPr>
+              <a:t>2</a:t>
+            </a:r>
+            <a:endParaRPr lang="en-US" sz="900" dirty="0"/>
+          </a:p>
+        </p:txBody>
+      </p:sp>
+      <p:sp>
+        <p:nvSpPr>
+          <p:cNvPr id="18" name="Text 16"/>
+          <p:cNvSpPr/>
+          <p:nvPr/>
+        </p:nvSpPr>
+        <p:spPr>
+          <a:xfrm>
+            <a:off x="1203127" y="2599730"/>
+            <a:ext cx="3279740" cy="202555"/>
+          </a:xfrm>
+          <a:prstGeom prst="rect">
+            <a:avLst/>
+          </a:prstGeom>
+          <a:noFill/>
+          <a:ln/>
+        </p:spPr>
+        <p:txBody>
+          <a:bodyPr wrap="square" lIns="0" tIns="0" rIns="0" bIns="0" rtlCol="0" anchor="t"/>
+          <a:lstStyle/>
+          <a:p>
             <a:pPr algn="l" indent="0" marL="0">
               <a:lnSpc>
                 <a:spcPts val="1595"/>
@@ -11702,164 +11604,19 @@
               <a:buNone/>
             </a:pPr>
             <a:r>
+              <a:rPr lang="en-US" sz="1100" dirty="0">
+                <a:solidFill>
+                  <a:srgbClr val="1E2A38"/>
+                </a:solidFill>
+                <a:latin typeface="Noto Sans SC" pitchFamily="34" charset="0"/>
+                <a:ea typeface="Noto Sans SC" pitchFamily="34" charset="-122"/>
+                <a:cs typeface="Noto Sans SC" pitchFamily="34" charset="-120"/>
+              </a:rPr>
+              <a:t>Students write a </a:t>
+            </a:r>
+            <a:r>
               <a:rPr lang="en-US" sz="1100" b="1" dirty="0">
                 <a:solidFill>
-                  <a:srgbClr val="1E2A38"/>
-                </a:solidFill>
-                <a:latin typeface="Noto Sans SC" pitchFamily="34" charset="0"/>
-                <a:ea typeface="Noto Sans SC" pitchFamily="34" charset="-122"/>
-                <a:cs typeface="Noto Sans SC" pitchFamily="34" charset="-120"/>
-              </a:rPr>
-              <a:t>3 different actions</a:t>
-            </a:r>
-            <a:pPr algn="l" indent="0" marL="0">
-              <a:lnSpc>
-                <a:spcPts val="1595"/>
-              </a:lnSpc>
-              <a:spcBef>
-                <a:spcPts val="200"/>
-              </a:spcBef>
-              <a:buNone/>
-            </a:pPr>
-            <a:r>
-              <a:rPr lang="en-US" sz="1100" dirty="0">
-                <a:solidFill>
-                  <a:srgbClr val="1E2A38"/>
-                </a:solidFill>
-                <a:latin typeface="Noto Sans SC" pitchFamily="34" charset="0"/>
-                <a:ea typeface="Noto Sans SC" pitchFamily="34" charset="-122"/>
-                <a:cs typeface="Noto Sans SC" pitchFamily="34" charset="-120"/>
-              </a:rPr>
-              <a:t> — one at a time.</a:t>
-            </a:r>
-            <a:endParaRPr lang="en-US" sz="1100" dirty="0"/>
-          </a:p>
-        </p:txBody>
-      </p:sp>
-      <p:sp>
-        <p:nvSpPr>
-          <p:cNvPr id="16" name="Text 14"/>
-          <p:cNvSpPr/>
-          <p:nvPr/>
-        </p:nvSpPr>
-        <p:spPr>
-          <a:xfrm>
-            <a:off x="796826" y="2574429"/>
-            <a:ext cx="279350" cy="279350"/>
-          </a:xfrm>
-          <a:prstGeom prst="roundRect">
-            <a:avLst>
-              <a:gd name="adj" fmla="val 327331"/>
-            </a:avLst>
-          </a:prstGeom>
-          <a:solidFill>
-            <a:srgbClr val="3A7D8C"/>
-          </a:solidFill>
-          <a:ln/>
-        </p:spPr>
-        <p:txBody>
-          <a:bodyPr wrap="square" rtlCol="0" anchor="ctr"/>
-          <a:lstStyle/>
-          <a:p>
-            <a:pPr indent="0" marL="0">
-              <a:buNone/>
-            </a:pPr>
-            <a:endParaRPr lang="en-US" dirty="0"/>
-          </a:p>
-        </p:txBody>
-      </p:sp>
-      <p:sp>
-        <p:nvSpPr>
-          <p:cNvPr id="17" name="Text 15"/>
-          <p:cNvSpPr/>
-          <p:nvPr/>
-        </p:nvSpPr>
-        <p:spPr>
-          <a:xfrm>
-            <a:off x="900261" y="2633067"/>
-            <a:ext cx="73929" cy="161925"/>
-          </a:xfrm>
-          <a:prstGeom prst="rect">
-            <a:avLst/>
-          </a:prstGeom>
-          <a:noFill/>
-          <a:ln/>
-        </p:spPr>
-        <p:txBody>
-          <a:bodyPr wrap="square" lIns="0" tIns="0" rIns="0" bIns="0" rtlCol="0" anchor="t"/>
-          <a:lstStyle/>
-          <a:p>
-            <a:pPr algn="l" indent="0" marL="0">
-              <a:buNone/>
-            </a:pPr>
-            <a:r>
-              <a:rPr lang="en-US" sz="900" b="1" dirty="0">
-                <a:solidFill>
-                  <a:srgbClr val="FFFFFF"/>
-                </a:solidFill>
-                <a:latin typeface="Noto Sans SC" pitchFamily="34" charset="0"/>
-                <a:ea typeface="Noto Sans SC" pitchFamily="34" charset="-122"/>
-                <a:cs typeface="Noto Sans SC" pitchFamily="34" charset="-120"/>
-              </a:rPr>
-              <a:t>2</a:t>
-            </a:r>
-            <a:endParaRPr lang="en-US" sz="900" dirty="0"/>
-          </a:p>
-        </p:txBody>
-      </p:sp>
-      <p:sp>
-        <p:nvSpPr>
-          <p:cNvPr id="18" name="Text 16"/>
-          <p:cNvSpPr/>
-          <p:nvPr/>
-        </p:nvSpPr>
-        <p:spPr>
-          <a:xfrm>
-            <a:off x="1203127" y="2599730"/>
-            <a:ext cx="3279740" cy="202555"/>
-          </a:xfrm>
-          <a:prstGeom prst="rect">
-            <a:avLst/>
-          </a:prstGeom>
-          <a:noFill/>
-          <a:ln/>
-        </p:spPr>
-        <p:txBody>
-          <a:bodyPr wrap="square" lIns="0" tIns="0" rIns="0" bIns="0" rtlCol="0" anchor="t"/>
-          <a:lstStyle/>
-          <a:p>
-            <a:pPr algn="l" indent="0" marL="0">
-              <a:lnSpc>
-                <a:spcPts val="1595"/>
-              </a:lnSpc>
-              <a:spcBef>
-                <a:spcPts val="200"/>
-              </a:spcBef>
-              <a:buNone/>
-            </a:pPr>
-            <a:r>
-              <a:rPr lang="en-US" sz="1100" dirty="0">
-                <a:solidFill>
-                  <a:srgbClr val="1E2A38"/>
-                </a:solidFill>
-                <a:latin typeface="Noto Sans SC" pitchFamily="34" charset="0"/>
-                <a:ea typeface="Noto Sans SC" pitchFamily="34" charset="-122"/>
-                <a:cs typeface="Noto Sans SC" pitchFamily="34" charset="-120"/>
-              </a:rPr>
-              <a:t>Students write a </a:t>
-            </a:r>
-            <a:pPr algn="l" indent="0" marL="0">
-              <a:lnSpc>
-                <a:spcPts val="1595"/>
-              </a:lnSpc>
-              <a:spcBef>
-                <a:spcPts val="200"/>
-              </a:spcBef>
-              <a:buNone/>
-            </a:pPr>
-            <a:r>
-              <a:rPr lang="en-US" sz="1100" b="1" dirty="0">
-                <a:solidFill>
                   <a:srgbClr val="3A7D8C"/>
                 </a:solidFill>
                 <a:latin typeface="Noto Sans SC" pitchFamily="34" charset="0"/>
@@ -11868,15 +11625,6 @@
               </a:rPr>
               <a:t>正在</a:t>
             </a:r>
-            <a:pPr algn="l" indent="0" marL="0">
-              <a:lnSpc>
-                <a:spcPts val="1595"/>
-              </a:lnSpc>
-              <a:spcBef>
-                <a:spcPts val="200"/>
-              </a:spcBef>
-              <a:buNone/>
-            </a:pPr>
             <a:r>
               <a:rPr lang="en-US" sz="1100" dirty="0">
                 <a:solidFill>
@@ -12345,6 +12093,53 @@
               </a:rPr>
               <a:t>油画儿、水彩画儿，我</a:t>
             </a:r>
+            <a:r>
+              <a:rPr lang="en-US" sz="1800" b="1" dirty="0">
+                <a:solidFill>
+                  <a:srgbClr val="C8943E"/>
+                </a:solidFill>
+                <a:latin typeface="Noto Serif SC" pitchFamily="34" charset="0"/>
+                <a:ea typeface="Noto Serif SC" pitchFamily="34" charset="-122"/>
+                <a:cs typeface="Noto Serif SC" pitchFamily="34" charset="-120"/>
+              </a:rPr>
+              <a:t>都</a:t>
+            </a:r>
+            <a:r>
+              <a:rPr lang="en-US" sz="1800" dirty="0">
+                <a:solidFill>
+                  <a:srgbClr val="1E2A38"/>
+                </a:solidFill>
+                <a:latin typeface="Noto Serif SC" pitchFamily="34" charset="0"/>
+                <a:ea typeface="Noto Serif SC" pitchFamily="34" charset="-122"/>
+                <a:cs typeface="Noto Serif SC" pitchFamily="34" charset="-120"/>
+              </a:rPr>
+              <a:t>喜欢画。</a:t>
+            </a:r>
+            <a:endParaRPr lang="en-US" sz="1800" dirty="0"/>
+          </a:p>
+        </p:txBody>
+      </p:sp>
+      <p:sp>
+        <p:nvSpPr>
+          <p:cNvPr id="31" name="Text 29"/>
+          <p:cNvSpPr/>
+          <p:nvPr/>
+        </p:nvSpPr>
+        <p:spPr>
+          <a:xfrm>
+            <a:off x="6670625" y="2949178"/>
+            <a:ext cx="4592395" cy="200025"/>
+          </a:xfrm>
+          <a:prstGeom prst="rect">
+            <a:avLst/>
+          </a:prstGeom>
+          <a:noFill/>
+          <a:ln/>
+        </p:spPr>
+        <p:txBody>
+          <a:bodyPr wrap="square" lIns="0" tIns="0" rIns="0" bIns="0" rtlCol="0" anchor="t"/>
+          <a:lstStyle/>
+          <a:p>
             <a:pPr algn="l" indent="0" marL="0">
               <a:spcAft>
                 <a:spcPts val="400"/>
@@ -12352,65 +12147,6 @@
               <a:buNone/>
             </a:pPr>
             <a:r>
-              <a:rPr lang="en-US" sz="1800" b="1" dirty="0">
-                <a:solidFill>
-                  <a:srgbClr val="C8943E"/>
-                </a:solidFill>
-                <a:latin typeface="Noto Serif SC" pitchFamily="34" charset="0"/>
-                <a:ea typeface="Noto Serif SC" pitchFamily="34" charset="-122"/>
-                <a:cs typeface="Noto Serif SC" pitchFamily="34" charset="-120"/>
-              </a:rPr>
-              <a:t>都</a:t>
-            </a:r>
-            <a:pPr algn="l" indent="0" marL="0">
-              <a:spcAft>
-                <a:spcPts val="400"/>
-              </a:spcAft>
-              <a:buNone/>
-            </a:pPr>
-            <a:r>
-              <a:rPr lang="en-US" sz="1800" dirty="0">
-                <a:solidFill>
-                  <a:srgbClr val="1E2A38"/>
-                </a:solidFill>
-                <a:latin typeface="Noto Serif SC" pitchFamily="34" charset="0"/>
-                <a:ea typeface="Noto Serif SC" pitchFamily="34" charset="-122"/>
-                <a:cs typeface="Noto Serif SC" pitchFamily="34" charset="-120"/>
-              </a:rPr>
-              <a:t>喜欢画。</a:t>
-            </a:r>
-            <a:endParaRPr lang="en-US" sz="1800" dirty="0"/>
-          </a:p>
-        </p:txBody>
-      </p:sp>
-      <p:sp>
-        <p:nvSpPr>
-          <p:cNvPr id="31" name="Text 29"/>
-          <p:cNvSpPr/>
-          <p:nvPr/>
-        </p:nvSpPr>
-        <p:spPr>
-          <a:xfrm>
-            <a:off x="6670625" y="2949178"/>
-            <a:ext cx="4592395" cy="200025"/>
-          </a:xfrm>
-          <a:prstGeom prst="rect">
-            <a:avLst/>
-          </a:prstGeom>
-          <a:noFill/>
-          <a:ln/>
-        </p:spPr>
-        <p:txBody>
-          <a:bodyPr wrap="square" lIns="0" tIns="0" rIns="0" bIns="0" rtlCol="0" anchor="t"/>
-          <a:lstStyle/>
-          <a:p>
-            <a:pPr algn="l" indent="0" marL="0">
-              <a:spcAft>
-                <a:spcPts val="400"/>
-              </a:spcAft>
-              <a:buNone/>
-            </a:pPr>
-            <a:r>
               <a:rPr lang="en-US" sz="1100" dirty="0">
                 <a:solidFill>
                   <a:srgbClr val="5B6677"/>
@@ -12421,12 +12157,6 @@
               </a:rPr>
               <a:t>Oil paintings and watercolours — I like painting </a:t>
             </a:r>
-            <a:pPr algn="l" indent="0" marL="0">
-              <a:spcAft>
-                <a:spcPts val="400"/>
-              </a:spcAft>
-              <a:buNone/>
-            </a:pPr>
             <a:r>
               <a:rPr lang="en-US" sz="1100" b="1" dirty="0">
                 <a:solidFill>
@@ -12438,12 +12168,6 @@
               </a:rPr>
               <a:t>both</a:t>
             </a:r>
-            <a:pPr algn="l" indent="0" marL="0">
-              <a:spcAft>
-                <a:spcPts val="400"/>
-              </a:spcAft>
-              <a:buNone/>
-            </a:pPr>
             <a:r>
               <a:rPr lang="en-US" sz="1100" dirty="0">
                 <a:solidFill>
@@ -12964,12 +12688,6 @@
               </a:rPr>
               <a:t>Express "both" and "all" preferences using the pattern </a:t>
             </a:r>
-            <a:pPr algn="l" indent="0" marL="0">
-              <a:lnSpc>
-                <a:spcPts val="1890"/>
-              </a:lnSpc>
-              <a:buNone/>
-            </a:pPr>
             <a:r>
               <a:rPr lang="en-US" sz="1400" b="1" dirty="0">
                 <a:solidFill>
@@ -13135,12 +12853,6 @@
               </a:rPr>
               <a:t>Place </a:t>
             </a:r>
-            <a:pPr algn="l" indent="0" marL="0">
-              <a:spcAft>
-                <a:spcPts val="300"/>
-              </a:spcAft>
-              <a:buNone/>
-            </a:pPr>
             <a:r>
               <a:rPr lang="en-US" sz="1300" b="1" dirty="0">
                 <a:solidFill>
@@ -13152,12 +12864,6 @@
               </a:rPr>
               <a:t>都</a:t>
             </a:r>
-            <a:pPr algn="l" indent="0" marL="0">
-              <a:spcAft>
-                <a:spcPts val="300"/>
-              </a:spcAft>
-              <a:buNone/>
-            </a:pPr>
             <a:r>
               <a:rPr lang="en-US" sz="1300" dirty="0">
                 <a:solidFill>
@@ -13208,9 +12914,6 @@
               </a:rPr>
               <a:t>油画儿、水彩画儿，我</a:t>
             </a:r>
-            <a:pPr algn="l" indent="0" marL="0">
-              <a:buNone/>
-            </a:pPr>
             <a:r>
               <a:rPr lang="en-US" sz="1200" dirty="0">
                 <a:solidFill>
@@ -13222,9 +12925,6 @@
               </a:rPr>
               <a:t>都</a:t>
             </a:r>
-            <a:pPr algn="l" indent="0" marL="0">
-              <a:buNone/>
-            </a:pPr>
             <a:r>
               <a:rPr lang="en-US" sz="1200" dirty="0">
                 <a:solidFill>
@@ -13351,12 +13051,6 @@
               </a:rPr>
               <a:t>List two or more items and use </a:t>
             </a:r>
-            <a:pPr algn="l" indent="0" marL="0">
-              <a:spcAft>
-                <a:spcPts val="300"/>
-              </a:spcAft>
-              <a:buNone/>
-            </a:pPr>
             <a:r>
               <a:rPr lang="en-US" sz="1300" b="1" dirty="0">
                 <a:solidFill>
@@ -13368,12 +13062,6 @@
               </a:rPr>
               <a:t>都</a:t>
             </a:r>
-            <a:pPr algn="l" indent="0" marL="0">
-              <a:spcAft>
-                <a:spcPts val="300"/>
-              </a:spcAft>
-              <a:buNone/>
-            </a:pPr>
             <a:r>
               <a:rPr lang="en-US" sz="1300" dirty="0">
                 <a:solidFill>
@@ -13424,9 +13112,6 @@
               </a:rPr>
               <a:t>小说、杂志，他</a:t>
             </a:r>
-            <a:pPr algn="l" indent="0" marL="0">
-              <a:buNone/>
-            </a:pPr>
             <a:r>
               <a:rPr lang="en-US" sz="1200" dirty="0">
                 <a:solidFill>
@@ -13438,9 +13123,6 @@
               </a:rPr>
               <a:t>都</a:t>
             </a:r>
-            <a:pPr algn="l" indent="0" marL="0">
-              <a:buNone/>
-            </a:pPr>
             <a:r>
               <a:rPr lang="en-US" sz="1200" dirty="0">
                 <a:solidFill>
@@ -13452,9 +13134,6 @@
               </a:rPr>
               <a:t>喜欢看。 弹钢琴、唱歌、听音乐，她</a:t>
             </a:r>
-            <a:pPr algn="l" indent="0" marL="0">
-              <a:buNone/>
-            </a:pPr>
             <a:r>
               <a:rPr lang="en-US" sz="1200" dirty="0">
                 <a:solidFill>
@@ -13466,9 +13145,6 @@
               </a:rPr>
               <a:t>都</a:t>
             </a:r>
-            <a:pPr algn="l" indent="0" marL="0">
-              <a:buNone/>
-            </a:pPr>
             <a:r>
               <a:rPr lang="en-US" sz="1200" dirty="0">
                 <a:solidFill>
@@ -13595,12 +13271,6 @@
               </a:rPr>
               <a:t>Combine </a:t>
             </a:r>
-            <a:pPr algn="l" indent="0" marL="0">
-              <a:spcAft>
-                <a:spcPts val="300"/>
-              </a:spcAft>
-              <a:buNone/>
-            </a:pPr>
             <a:r>
               <a:rPr lang="en-US" sz="1300" b="1" dirty="0">
                 <a:solidFill>
@@ -13612,12 +13282,6 @@
               </a:rPr>
               <a:t>都</a:t>
             </a:r>
-            <a:pPr algn="l" indent="0" marL="0">
-              <a:spcAft>
-                <a:spcPts val="300"/>
-              </a:spcAft>
-              <a:buNone/>
-            </a:pPr>
             <a:r>
               <a:rPr lang="en-US" sz="1300" dirty="0">
                 <a:solidFill>
@@ -13629,12 +13293,6 @@
               </a:rPr>
               <a:t> and </a:t>
             </a:r>
-            <a:pPr algn="l" indent="0" marL="0">
-              <a:spcAft>
-                <a:spcPts val="300"/>
-              </a:spcAft>
-              <a:buNone/>
-            </a:pPr>
             <a:r>
               <a:rPr lang="en-US" sz="1300" b="1" dirty="0">
                 <a:solidFill>
@@ -13646,12 +13304,6 @@
               </a:rPr>
               <a:t>正在</a:t>
             </a:r>
-            <a:pPr algn="l" indent="0" marL="0">
-              <a:spcAft>
-                <a:spcPts val="300"/>
-              </a:spcAft>
-              <a:buNone/>
-            </a:pPr>
             <a:r>
               <a:rPr lang="en-US" sz="1300" dirty="0">
                 <a:solidFill>
@@ -13702,9 +13354,6 @@
               </a:rPr>
               <a:t>我正在弹钢琴。吉他、钢琴，我</a:t>
             </a:r>
-            <a:pPr algn="l" indent="0" marL="0">
-              <a:buNone/>
-            </a:pPr>
             <a:r>
               <a:rPr lang="en-US" sz="1200" dirty="0">
                 <a:solidFill>
@@ -13716,9 +13365,6 @@
               </a:rPr>
               <a:t>都</a:t>
             </a:r>
-            <a:pPr algn="l" indent="0" marL="0">
-              <a:buNone/>
-            </a:pPr>
             <a:r>
               <a:rPr lang="en-US" sz="1200" dirty="0">
                 <a:solidFill>
@@ -14759,9 +14405,6 @@
               </a:rPr>
               <a:t>油画儿、水彩画儿，我</a:t>
             </a:r>
-            <a:pPr algn="l" indent="0" marL="0">
-              <a:buNone/>
-            </a:pPr>
             <a:r>
               <a:rPr lang="en-US" sz="1900" b="1" dirty="0">
                 <a:solidFill>
@@ -14773,9 +14416,6 @@
               </a:rPr>
               <a:t>都</a:t>
             </a:r>
-            <a:pPr algn="l" indent="0" marL="0">
-              <a:buNone/>
-            </a:pPr>
             <a:r>
               <a:rPr lang="en-US" sz="1600" dirty="0">
                 <a:solidFill>
@@ -14826,9 +14466,6 @@
               </a:rPr>
               <a:t>Oil paintings and watercolours — I like painting </a:t>
             </a:r>
-            <a:pPr algn="l" indent="0" marL="0">
-              <a:buNone/>
-            </a:pPr>
             <a:r>
               <a:rPr lang="en-US" sz="1000" b="1" dirty="0">
                 <a:solidFill>
@@ -14840,9 +14477,6 @@
               </a:rPr>
               <a:t>both</a:t>
             </a:r>
-            <a:pPr algn="l" indent="0" marL="0">
-              <a:buNone/>
-            </a:pPr>
             <a:r>
               <a:rPr lang="en-US" sz="1000" dirty="0">
                 <a:solidFill>
@@ -14968,9 +14602,6 @@
               </a:rPr>
               <a:t>小说、杂志，他</a:t>
             </a:r>
-            <a:pPr algn="l" indent="0" marL="0">
-              <a:buNone/>
-            </a:pPr>
             <a:r>
               <a:rPr lang="en-US" sz="1900" b="1" dirty="0">
                 <a:solidFill>
@@ -14982,9 +14613,6 @@
               </a:rPr>
               <a:t>都</a:t>
             </a:r>
-            <a:pPr algn="l" indent="0" marL="0">
-              <a:buNone/>
-            </a:pPr>
             <a:r>
               <a:rPr lang="en-US" sz="1600" dirty="0">
                 <a:solidFill>
@@ -15035,9 +14663,6 @@
               </a:rPr>
               <a:t>Novels and magazines — he likes reading </a:t>
             </a:r>
-            <a:pPr algn="l" indent="0" marL="0">
-              <a:buNone/>
-            </a:pPr>
             <a:r>
               <a:rPr lang="en-US" sz="1000" b="1" dirty="0">
                 <a:solidFill>
@@ -15049,9 +14674,6 @@
               </a:rPr>
               <a:t>both</a:t>
             </a:r>
-            <a:pPr algn="l" indent="0" marL="0">
-              <a:buNone/>
-            </a:pPr>
             <a:r>
               <a:rPr lang="en-US" sz="1000" dirty="0">
                 <a:solidFill>
@@ -15177,9 +14799,6 @@
               </a:rPr>
               <a:t>弹钢琴、唱歌、听音乐，她</a:t>
             </a:r>
-            <a:pPr algn="l" indent="0" marL="0">
-              <a:buNone/>
-            </a:pPr>
             <a:r>
               <a:rPr lang="en-US" sz="1900" b="1" dirty="0">
                 <a:solidFill>
@@ -15191,9 +14810,6 @@
               </a:rPr>
               <a:t>都</a:t>
             </a:r>
-            <a:pPr algn="l" indent="0" marL="0">
-              <a:buNone/>
-            </a:pPr>
             <a:r>
               <a:rPr lang="en-US" sz="1600" dirty="0">
                 <a:solidFill>
@@ -15244,9 +14860,6 @@
               </a:rPr>
               <a:t>Piano, singing, music — she likes them </a:t>
             </a:r>
-            <a:pPr algn="l" indent="0" marL="0">
-              <a:buNone/>
-            </a:pPr>
             <a:r>
               <a:rPr lang="en-US" sz="1000" b="1" dirty="0">
                 <a:solidFill>
@@ -15258,9 +14871,6 @@
               </a:rPr>
               <a:t>all</a:t>
             </a:r>
-            <a:pPr algn="l" indent="0" marL="0">
-              <a:buNone/>
-            </a:pPr>
             <a:r>
               <a:rPr lang="en-US" sz="1000" dirty="0">
                 <a:solidFill>
@@ -15764,12 +15374,6 @@
               </a:rPr>
               <a:t>小说、杂志，我喜欢</a:t>
             </a:r>
-            <a:pPr algn="l" indent="0" marL="0">
-              <a:lnSpc>
-                <a:spcPts val="4200"/>
-              </a:lnSpc>
-              <a:buNone/>
-            </a:pPr>
             <a:r>
               <a:rPr lang="en-US" sz="3000" b="1" dirty="0">
                 <a:solidFill>
@@ -15781,12 +15385,6 @@
               </a:rPr>
               <a:t>都</a:t>
             </a:r>
-            <a:pPr algn="l" indent="0" marL="0">
-              <a:lnSpc>
-                <a:spcPts val="4200"/>
-              </a:lnSpc>
-              <a:buNone/>
-            </a:pPr>
             <a:r>
               <a:rPr lang="en-US" sz="2600" dirty="0">
                 <a:solidFill>
@@ -16054,12 +15652,6 @@
               </a:rPr>
               <a:t>小说、杂志，我</a:t>
             </a:r>
-            <a:pPr algn="l" indent="0" marL="0">
-              <a:lnSpc>
-                <a:spcPts val="4200"/>
-              </a:lnSpc>
-              <a:buNone/>
-            </a:pPr>
             <a:r>
               <a:rPr lang="en-US" sz="3000" b="1" dirty="0">
                 <a:solidFill>
@@ -16071,12 +15663,6 @@
               </a:rPr>
               <a:t>都</a:t>
             </a:r>
-            <a:pPr algn="l" indent="0" marL="0">
-              <a:lnSpc>
-                <a:spcPts val="4200"/>
-              </a:lnSpc>
-              <a:buNone/>
-            </a:pPr>
             <a:r>
               <a:rPr lang="en-US" sz="2600" dirty="0">
                 <a:solidFill>
@@ -16260,9 +15846,6 @@
               </a:rPr>
               <a:t>Items ，Subject </a:t>
             </a:r>
-            <a:pPr algn="ctr" indent="0" marL="0">
-              <a:buNone/>
-            </a:pPr>
             <a:r>
               <a:rPr lang="en-US" sz="1700" b="1" dirty="0">
                 <a:solidFill>
@@ -16274,9 +15857,6 @@
               </a:rPr>
               <a:t>都</a:t>
             </a:r>
-            <a:pPr algn="ctr" indent="0" marL="0">
-              <a:buNone/>
-            </a:pPr>
             <a:r>
               <a:rPr lang="en-US" sz="1400" dirty="0">
                 <a:solidFill>
@@ -16829,12 +16409,6 @@
               </a:rPr>
               <a:t>Where does </a:t>
             </a:r>
-            <a:pPr algn="l" indent="0" marL="0">
-              <a:lnSpc>
-                <a:spcPts val="2240"/>
-              </a:lnSpc>
-              <a:buNone/>
-            </a:pPr>
             <a:r>
               <a:rPr lang="en-US" sz="1600" b="1" dirty="0">
                 <a:solidFill>
@@ -16846,12 +16420,6 @@
               </a:rPr>
               <a:t>都</a:t>
             </a:r>
-            <a:pPr algn="l" indent="0" marL="0">
-              <a:lnSpc>
-                <a:spcPts val="2240"/>
-              </a:lnSpc>
-              <a:buNone/>
-            </a:pPr>
             <a:r>
               <a:rPr lang="en-US" sz="1400" dirty="0">
                 <a:solidFill>
@@ -17146,12 +16714,6 @@
               </a:rPr>
               <a:t>Write in Chinese: "Guitar and piano — I like playing </a:t>
             </a:r>
-            <a:pPr algn="l" indent="0" marL="0">
-              <a:lnSpc>
-                <a:spcPts val="1960"/>
-              </a:lnSpc>
-              <a:buNone/>
-            </a:pPr>
             <a:r>
               <a:rPr lang="en-US" sz="1400" b="1" dirty="0">
                 <a:solidFill>
@@ -17163,12 +16725,6 @@
               </a:rPr>
               <a:t>both</a:t>
             </a:r>
-            <a:pPr algn="l" indent="0" marL="0">
-              <a:lnSpc>
-                <a:spcPts val="1960"/>
-              </a:lnSpc>
-              <a:buNone/>
-            </a:pPr>
             <a:r>
               <a:rPr lang="en-US" sz="1400" dirty="0">
                 <a:solidFill>
@@ -18335,9 +17891,6 @@
               </a:rPr>
               <a:t>Before</a:t>
             </a:r>
-            <a:pPr algn="l" indent="0" marL="0">
-              <a:buNone/>
-            </a:pPr>
             <a:r>
               <a:rPr lang="en-US" sz="1500" dirty="0">
                 <a:solidFill>
@@ -18349,9 +17902,6 @@
               </a:rPr>
               <a:t> the verb. Subject + </a:t>
             </a:r>
-            <a:pPr algn="l" indent="0" marL="0">
-              <a:buNone/>
-            </a:pPr>
             <a:r>
               <a:rPr lang="en-US" sz="1800" b="1" dirty="0">
                 <a:solidFill>
@@ -18363,9 +17913,6 @@
               </a:rPr>
               <a:t>都</a:t>
             </a:r>
-            <a:pPr algn="l" indent="0" marL="0">
-              <a:buNone/>
-            </a:pPr>
             <a:r>
               <a:rPr lang="en-US" sz="1500" dirty="0">
                 <a:solidFill>
@@ -18699,9 +18246,6 @@
               </a:rPr>
               <a:t>吉他、钢琴，我</a:t>
             </a:r>
-            <a:pPr algn="l" indent="0" marL="0">
-              <a:buNone/>
-            </a:pPr>
             <a:r>
               <a:rPr lang="en-US" sz="1800" b="1" dirty="0">
                 <a:solidFill>
@@ -18713,9 +18257,6 @@
               </a:rPr>
               <a:t>都</a:t>
             </a:r>
-            <a:pPr algn="l" indent="0" marL="0">
-              <a:buNone/>
-            </a:pPr>
             <a:r>
               <a:rPr lang="en-US" sz="1500" dirty="0">
                 <a:solidFill>
@@ -18935,12 +18476,6 @@
               </a:rPr>
               <a:t>What is wrong? </a:t>
             </a:r>
-            <a:pPr algn="l" indent="0" marL="0">
-              <a:lnSpc>
-                <a:spcPts val="1560"/>
-              </a:lnSpc>
-              <a:buNone/>
-            </a:pPr>
             <a:r>
               <a:rPr lang="en-US" sz="1200" i="1" dirty="0">
                 <a:solidFill>
@@ -19141,9 +18676,6 @@
               </a:rPr>
               <a:t>弹钢琴、唱歌，我</a:t>
             </a:r>
-            <a:pPr algn="l" indent="0" marL="0">
-              <a:buNone/>
-            </a:pPr>
             <a:r>
               <a:rPr lang="en-US" sz="1800" b="1" dirty="0">
                 <a:solidFill>
@@ -19155,9 +18687,6 @@
               </a:rPr>
               <a:t>都</a:t>
             </a:r>
-            <a:pPr algn="l" indent="0" marL="0">
-              <a:buNone/>
-            </a:pPr>
             <a:r>
               <a:rPr lang="en-US" sz="1500" dirty="0">
                 <a:solidFill>
@@ -21466,9 +20995,6 @@
               </a:rPr>
               <a:t>小说、杂志，我</a:t>
             </a:r>
-            <a:pPr algn="l" indent="0" marL="0">
-              <a:buNone/>
-            </a:pPr>
             <a:r>
               <a:rPr lang="en-US" sz="1700" b="1" dirty="0">
                 <a:solidFill>
@@ -21480,9 +21006,6 @@
               </a:rPr>
               <a:t>都</a:t>
             </a:r>
-            <a:pPr algn="l" indent="0" marL="0">
-              <a:buNone/>
-            </a:pPr>
             <a:r>
               <a:rPr lang="en-US" sz="1700" dirty="0">
                 <a:solidFill>
@@ -21719,9 +21242,6 @@
               </a:rPr>
               <a:t>油画儿、水彩画儿，她</a:t>
             </a:r>
-            <a:pPr algn="l" indent="0" marL="0">
-              <a:buNone/>
-            </a:pPr>
             <a:r>
               <a:rPr lang="en-US" sz="1700" b="1" dirty="0">
                 <a:solidFill>
@@ -21733,9 +21253,6 @@
               </a:rPr>
               <a:t>都</a:t>
             </a:r>
-            <a:pPr algn="l" indent="0" marL="0">
-              <a:buNone/>
-            </a:pPr>
             <a:r>
               <a:rPr lang="en-US" sz="1700" dirty="0">
                 <a:solidFill>
@@ -21972,9 +21489,6 @@
               </a:rPr>
               <a:t>弹钢琴、唱歌，他</a:t>
             </a:r>
-            <a:pPr algn="l" indent="0" marL="0">
-              <a:buNone/>
-            </a:pPr>
             <a:r>
               <a:rPr lang="en-US" sz="1700" b="1" dirty="0">
                 <a:solidFill>
@@ -21986,9 +21500,6 @@
               </a:rPr>
               <a:t>都</a:t>
             </a:r>
-            <a:pPr algn="l" indent="0" marL="0">
-              <a:buNone/>
-            </a:pPr>
             <a:r>
               <a:rPr lang="en-US" sz="1700" dirty="0">
                 <a:solidFill>
@@ -22225,9 +21736,6 @@
               </a:rPr>
               <a:t>国画儿、油画儿，我</a:t>
             </a:r>
-            <a:pPr algn="l" indent="0" marL="0">
-              <a:buNone/>
-            </a:pPr>
             <a:r>
               <a:rPr lang="en-US" sz="1700" b="1" dirty="0">
                 <a:solidFill>
@@ -22239,9 +21747,6 @@
               </a:rPr>
               <a:t>都</a:t>
             </a:r>
-            <a:pPr algn="l" indent="0" marL="0">
-              <a:buNone/>
-            </a:pPr>
             <a:r>
               <a:rPr lang="en-US" sz="1700" dirty="0">
                 <a:solidFill>
